--- a/lecons/F4/46_F4_M2_L36_The_Impact_of_Agriculture_on_the_Economy_of_Cameroon.pptx
+++ b/lecons/F4/46_F4_M2_L36_The_Impact_of_Agriculture_on_the_Economy_of_Cameroon.pptx
@@ -12859,7 +12859,7 @@
         <p:spPr>
           <a:xfrm>
             <a:off x="0" y="658368"/>
-            <a:ext cx="2468880" cy="5833872"/>
+            <a:ext cx="3840480" cy="5833872"/>
           </a:xfrm>
           <a:prstGeom prst="rect">
             <a:avLst/>
@@ -12874,8 +12874,8 @@
         </p:nvSpPr>
         <p:spPr>
           <a:xfrm>
-            <a:off x="2697480" y="1005840"/>
-            <a:ext cx="9174175" cy="731520"/>
+            <a:off x="4069080" y="1005840"/>
+            <a:ext cx="7802575" cy="731520"/>
           </a:xfrm>
           <a:prstGeom prst="rect">
             <a:avLst/>
@@ -12915,8 +12915,8 @@
         </p:nvSpPr>
         <p:spPr>
           <a:xfrm>
-            <a:off x="2697480" y="1783080"/>
-            <a:ext cx="9174175" cy="4663440"/>
+            <a:off x="4069080" y="1783080"/>
+            <a:ext cx="7802575" cy="4663440"/>
           </a:xfrm>
           <a:prstGeom prst="rect">
             <a:avLst/>
@@ -12935,7 +12935,7 @@
               <a:buNone/>
             </a:pPr>
             <a:r>
-              <a:rPr lang="en-US" sz="4000" b="1" dirty="0">
+              <a:rPr lang="en-US" sz="3200" b="1" dirty="0">
                 <a:solidFill>
                   <a:srgbClr val="111111"/>
                 </a:solidFill>
@@ -12945,7 +12945,7 @@
               </a:rPr>
               <a:t>Topic: Managing Resources for Development through Economic Activities</a:t>
             </a:r>
-            <a:endParaRPr lang="en-US" sz="4000" dirty="0"/>
+            <a:endParaRPr lang="en-US" sz="3200" dirty="0"/>
           </a:p>
           <a:p>
             <a:pPr algn="l" indent="0" marL="0">
@@ -12955,7 +12955,7 @@
               <a:buNone/>
             </a:pPr>
             <a:r>
-              <a:rPr lang="en-US" sz="4000" b="1" dirty="0">
+              <a:rPr lang="en-US" sz="3200" b="1" dirty="0">
                 <a:solidFill>
                   <a:srgbClr val="111111"/>
                 </a:solidFill>
@@ -12965,7 +12965,7 @@
               </a:rPr>
               <a:t>Sub-topic: The Economic Development Potentials of Cameroon in the Primary Sector: Agriculture</a:t>
             </a:r>
-            <a:endParaRPr lang="en-US" sz="4000" dirty="0"/>
+            <a:endParaRPr lang="en-US" sz="3200" dirty="0"/>
           </a:p>
           <a:p>
             <a:pPr algn="l" indent="0" marL="0">
@@ -12975,7 +12975,7 @@
               <a:buNone/>
             </a:pPr>
             <a:r>
-              <a:rPr lang="en-US" sz="4000" b="1" dirty="0">
+              <a:rPr lang="en-US" sz="3200" b="1" dirty="0">
                 <a:solidFill>
                   <a:srgbClr val="990011"/>
                 </a:solidFill>
@@ -12985,7 +12985,7 @@
               </a:rPr>
               <a:t>Lesson 36: The Impact of Agriculture on the Economy of Cameroon</a:t>
             </a:r>
-            <a:endParaRPr lang="en-US" sz="4000" dirty="0"/>
+            <a:endParaRPr lang="en-US" sz="3200" dirty="0"/>
           </a:p>
         </p:txBody>
       </p:sp>
